--- a/curso/pptx/S16.pptx
+++ b/curso/pptx/S16.pptx
@@ -5209,7 +5209,7 @@
                 </a:solidFill>
                 <a:latin typeface="Nunito Sans"/>
               </a:rPr>
-              <a:t>El miedo, la pena o la culpa </a:t>
+              <a:t>恐惧、同情或愧疚</a:t>
             </a:r>
             <a:r>
               <a:rPr sz="2600" b="1">
@@ -5218,7 +5218,7 @@
                 </a:solidFill>
                 <a:latin typeface="Nunito Sans"/>
               </a:rPr>
-              <a:t>sustituyen</a:t>
+              <a:t>代替</a:t>
             </a:r>
             <a:r>
               <a:rPr sz="2600" b="0">
@@ -5227,7 +5227,7 @@
                 </a:solidFill>
                 <a:latin typeface="Nunito Sans"/>
               </a:rPr>
-              <a:t> a las razones</a:t>
+              <a:t>了理由</a:t>
             </a:r>
           </a:p>
           <a:p>
@@ -5252,7 +5252,7 @@
                 </a:solidFill>
                 <a:latin typeface="Nunito Sans"/>
               </a:rPr>
-              <a:t>El peligro no se demuestra</a:t>
+              <a:t>危险没有被证明</a:t>
             </a:r>
           </a:p>
           <a:p>
@@ -5277,7 +5277,7 @@
                 </a:solidFill>
                 <a:latin typeface="Nunito Sans"/>
               </a:rPr>
-              <a:t>Te meten prisa para que no pienses</a:t>
+              <a:t>他们催着你，不让你思考</a:t>
             </a:r>
           </a:p>
         </p:txBody>
@@ -5407,7 +5407,7 @@
                 </a:solidFill>
                 <a:latin typeface="Nunito Sans"/>
               </a:rPr>
-              <a:t>La emoción </a:t>
+              <a:t>情绪</a:t>
             </a:r>
             <a:r>
               <a:rPr sz="2600" b="1">
@@ -5416,7 +5416,7 @@
                 </a:solidFill>
                 <a:latin typeface="Nunito Sans"/>
               </a:rPr>
-              <a:t>acompaña</a:t>
+              <a:t>伴随</a:t>
             </a:r>
             <a:r>
               <a:rPr sz="2600" b="0">
@@ -5425,7 +5425,7 @@
                 </a:solidFill>
                 <a:latin typeface="Nunito Sans"/>
               </a:rPr>
-              <a:t> a las razones</a:t>
+              <a:t>着理由</a:t>
             </a:r>
           </a:p>
           <a:p>
@@ -5450,7 +5450,7 @@
                 </a:solidFill>
                 <a:latin typeface="Nunito Sans"/>
               </a:rPr>
-              <a:t>El peligro es real y se explica</a:t>
+              <a:t>危险是真的，而且做了解释</a:t>
             </a:r>
           </a:p>
           <a:p>
@@ -5475,7 +5475,7 @@
                 </a:solidFill>
                 <a:latin typeface="Nunito Sans"/>
               </a:rPr>
-              <a:t>Puedes comprobarlo con calma</a:t>
+              <a:t>你可以冷静地去核实</a:t>
             </a:r>
           </a:p>
         </p:txBody>
@@ -7603,7 +7603,7 @@
                 </a:solidFill>
                 <a:latin typeface="Nunito Sans"/>
               </a:rPr>
-              <a:t>Busca que decidas </a:t>
+              <a:t>想让你</a:t>
             </a:r>
             <a:r>
               <a:rPr sz="2800" b="1">
@@ -7612,7 +7612,7 @@
                 </a:solidFill>
                 <a:latin typeface="Nunito Sans"/>
               </a:rPr>
-              <a:t>rápido</a:t>
+              <a:t>很快</a:t>
             </a:r>
             <a:r>
               <a:rPr sz="2800" b="0">
@@ -7621,7 +7621,7 @@
                 </a:solidFill>
                 <a:latin typeface="Nunito Sans"/>
               </a:rPr>
-              <a:t>, sin pensar</a:t>
+              <a:t>做决定，不要思考</a:t>
             </a:r>
           </a:p>
           <a:p>
@@ -7646,7 +7646,7 @@
                 </a:solidFill>
                 <a:latin typeface="Nunito Sans"/>
               </a:rPr>
-              <a:t>Cadenas de WhatsApp, anuncios, rumores</a:t>
+              <a:t>微信（WhatsApp）连锁消息、广告、谣言</a:t>
             </a:r>
           </a:p>
           <a:p>
@@ -7671,7 +7671,7 @@
                 </a:solidFill>
                 <a:latin typeface="Nunito Sans"/>
               </a:rPr>
-              <a:t>Pregunta: </a:t>
+              <a:t>要问：</a:t>
             </a:r>
             <a:r>
               <a:rPr sz="2800" b="1">
@@ -7680,7 +7680,7 @@
                 </a:solidFill>
                 <a:latin typeface="Nunito Sans"/>
               </a:rPr>
-              <a:t>¿ese peligro es real? ¿Qué pruebas hay?</a:t>
+              <a:t>这个危险是真的吗？有什么证据？</a:t>
             </a:r>
           </a:p>
         </p:txBody>
@@ -7914,7 +7914,7 @@
                 </a:solidFill>
                 <a:latin typeface="Nunito Sans"/>
               </a:rPr>
-              <a:t>También se llama apelación a la </a:t>
+              <a:t>也叫作诉诸</a:t>
             </a:r>
             <a:r>
               <a:rPr sz="2800" b="1">
@@ -7923,7 +7923,7 @@
                 </a:solidFill>
                 <a:latin typeface="Nunito Sans"/>
               </a:rPr>
-              <a:t>compasión</a:t>
+              <a:t>怜悯</a:t>
             </a:r>
           </a:p>
           <a:p>
@@ -7948,7 +7948,7 @@
                 </a:solidFill>
                 <a:latin typeface="Nunito Sans"/>
               </a:rPr>
-              <a:t>La pena puede ser real, pero no responde</a:t>
+              <a:t>同情可能是真的，但它没有回答问题</a:t>
             </a:r>
           </a:p>
           <a:p>
@@ -7973,7 +7973,7 @@
                 </a:solidFill>
                 <a:latin typeface="Nunito Sans"/>
               </a:rPr>
-              <a:t>Pregunta: </a:t>
+              <a:t>要问：</a:t>
             </a:r>
             <a:r>
               <a:rPr sz="2800" b="1">
@@ -7982,7 +7982,7 @@
                 </a:solidFill>
                 <a:latin typeface="Nunito Sans"/>
               </a:rPr>
-              <a:t>si quito la pena, ¿qué razón queda?</a:t>
+              <a:t>如果去掉同情，还剩下什么理由？</a:t>
             </a:r>
           </a:p>
         </p:txBody>

--- a/curso/pptx/S16.pptx
+++ b/curso/pptx/S16.pptx
@@ -4439,7 +4439,7 @@
                 </a:solidFill>
                 <a:latin typeface="Nunito Sans"/>
               </a:rPr>
-              <a:t>伊克尔对老师说：“别因为我在课堂上用手机给我记处分。我妈妈会惩罚我，不让我去看毕尔巴鄂竞技（Athletic）的比赛。”</a:t>
+              <a:t>一个男孩对老师说：“别因为我在课堂上用手机给我记处分。我妈妈会惩罚我，不让我去看毕尔巴鄂竞技（Athletic）的比赛。”</a:t>
             </a:r>
           </a:p>
         </p:txBody>
@@ -4512,7 +4512,7 @@
                 </a:solidFill>
                 <a:latin typeface="Nunito Sans"/>
               </a:rPr>
-              <a:t>伊克尔给了什么理由？受到惩罚会让他很难过。</a:t>
+              <a:t>这个男孩给了什么理由？受到惩罚会让他很难过。</a:t>
             </a:r>
           </a:p>
           <a:p>
